--- a/FloodView_Why_Different_Matrix.pptx
+++ b/FloodView_Why_Different_Matrix.pptx
@@ -1286,7 +1286,7 @@
                 <a:ea typeface="Calibri" pitchFamily="34" charset="-122"/>
                 <a:cs typeface="Calibri" pitchFamily="34" charset="-120"/>
               </a:rPr>
-              <a:t>JalRaksha</a:t>
+              <a:t>FloodView</a:t>
             </a:r>
             <a:endParaRPr lang="en-US" sz="1050" dirty="0"/>
           </a:p>
